--- a/tutorials/lab6_FPGA原型验证.pptx
+++ b/tutorials/lab6_FPGA原型验证.pptx
@@ -5,16 +5,17 @@
     <p:sldMasterId id="2147484040" r:id="rId1"/>
   </p:sldMasterIdLst>
   <p:notesMasterIdLst>
-    <p:notesMasterId r:id="rId9"/>
+    <p:notesMasterId r:id="rId10"/>
   </p:notesMasterIdLst>
   <p:sldIdLst>
     <p:sldId id="2248" r:id="rId2"/>
-    <p:sldId id="7067" r:id="rId3"/>
-    <p:sldId id="6814" r:id="rId4"/>
-    <p:sldId id="6798" r:id="rId5"/>
-    <p:sldId id="6799" r:id="rId6"/>
-    <p:sldId id="6806" r:id="rId7"/>
-    <p:sldId id="6813" r:id="rId8"/>
+    <p:sldId id="6903" r:id="rId3"/>
+    <p:sldId id="7067" r:id="rId4"/>
+    <p:sldId id="6814" r:id="rId5"/>
+    <p:sldId id="6798" r:id="rId6"/>
+    <p:sldId id="6799" r:id="rId7"/>
+    <p:sldId id="6806" r:id="rId8"/>
+    <p:sldId id="6813" r:id="rId9"/>
   </p:sldIdLst>
   <p:sldSz cx="9144000" cy="6858000" type="screen4x3"/>
   <p:notesSz cx="7102475" cy="10233025"/>
@@ -119,6 +120,7 @@
         <p14:section name="提纲" id="{61A3C44E-92D6-46EB-A1AC-09F30B6D5135}">
           <p14:sldIdLst>
             <p14:sldId id="2248"/>
+            <p14:sldId id="6903"/>
             <p14:sldId id="7067"/>
             <p14:sldId id="6814"/>
             <p14:sldId id="6798"/>
@@ -241,7 +243,7 @@
           <a:p>
             <a:fld id="{9ED75E01-0EF1-48C2-A225-423E6166D74A}" type="datetimeFigureOut">
               <a:rPr lang="zh-CN" altLang="en-US" smtClean="0"/>
-              <a:t>2024/10/11</a:t>
+              <a:t>2025/11/13</a:t>
             </a:fld>
             <a:endParaRPr lang="zh-CN" altLang="en-US"/>
           </a:p>
@@ -665,7 +667,7 @@
           <a:p>
             <a:fld id="{7027C812-51A0-4146-959B-26F7A04B258F}" type="slidenum">
               <a:rPr lang="zh-CN" altLang="en-US" smtClean="0"/>
-              <a:t>3</a:t>
+              <a:t>2</a:t>
             </a:fld>
             <a:endParaRPr lang="zh-CN" altLang="en-US"/>
           </a:p>
@@ -674,7 +676,7 @@
     </p:spTree>
     <p:extLst>
       <p:ext uri="{BB962C8B-B14F-4D97-AF65-F5344CB8AC3E}">
-        <p14:creationId xmlns:p14="http://schemas.microsoft.com/office/powerpoint/2010/main" val="3918156996"/>
+        <p14:creationId xmlns:p14="http://schemas.microsoft.com/office/powerpoint/2010/main" val="2344551289"/>
       </p:ext>
     </p:extLst>
   </p:cSld>
@@ -749,7 +751,7 @@
           <a:p>
             <a:fld id="{7027C812-51A0-4146-959B-26F7A04B258F}" type="slidenum">
               <a:rPr lang="zh-CN" altLang="en-US" smtClean="0"/>
-              <a:t>6</a:t>
+              <a:t>4</a:t>
             </a:fld>
             <a:endParaRPr lang="zh-CN" altLang="en-US"/>
           </a:p>
@@ -758,7 +760,7 @@
     </p:spTree>
     <p:extLst>
       <p:ext uri="{BB962C8B-B14F-4D97-AF65-F5344CB8AC3E}">
-        <p14:creationId xmlns:p14="http://schemas.microsoft.com/office/powerpoint/2010/main" val="858124169"/>
+        <p14:creationId xmlns:p14="http://schemas.microsoft.com/office/powerpoint/2010/main" val="3918156996"/>
       </p:ext>
     </p:extLst>
   </p:cSld>
@@ -834,6 +836,90 @@
             <a:fld id="{7027C812-51A0-4146-959B-26F7A04B258F}" type="slidenum">
               <a:rPr lang="zh-CN" altLang="en-US" smtClean="0"/>
               <a:t>7</a:t>
+            </a:fld>
+            <a:endParaRPr lang="zh-CN" altLang="en-US"/>
+          </a:p>
+        </p:txBody>
+      </p:sp>
+    </p:spTree>
+    <p:extLst>
+      <p:ext uri="{BB962C8B-B14F-4D97-AF65-F5344CB8AC3E}">
+        <p14:creationId xmlns:p14="http://schemas.microsoft.com/office/powerpoint/2010/main" val="858124169"/>
+      </p:ext>
+    </p:extLst>
+  </p:cSld>
+  <p:clrMapOvr>
+    <a:masterClrMapping/>
+  </p:clrMapOvr>
+</p:notes>
+</file>
+
+<file path=ppt/notesSlides/notesSlide5.xml><?xml version="1.0" encoding="utf-8"?>
+<p:notes xmlns:a="http://schemas.openxmlformats.org/drawingml/2006/main" xmlns:r="http://schemas.openxmlformats.org/officeDocument/2006/relationships" xmlns:p="http://schemas.openxmlformats.org/presentationml/2006/main">
+  <p:cSld>
+    <p:spTree>
+      <p:nvGrpSpPr>
+        <p:cNvPr id="1" name=""/>
+        <p:cNvGrpSpPr/>
+        <p:nvPr/>
+      </p:nvGrpSpPr>
+      <p:grpSpPr>
+        <a:xfrm>
+          <a:off x="0" y="0"/>
+          <a:ext cx="0" cy="0"/>
+          <a:chOff x="0" y="0"/>
+          <a:chExt cx="0" cy="0"/>
+        </a:xfrm>
+      </p:grpSpPr>
+      <p:sp>
+        <p:nvSpPr>
+          <p:cNvPr id="2" name="幻灯片图像占位符 1"/>
+          <p:cNvSpPr>
+            <a:spLocks noGrp="1" noRot="1" noChangeAspect="1"/>
+          </p:cNvSpPr>
+          <p:nvPr>
+            <p:ph type="sldImg"/>
+          </p:nvPr>
+        </p:nvSpPr>
+        <p:spPr/>
+      </p:sp>
+      <p:sp>
+        <p:nvSpPr>
+          <p:cNvPr id="3" name="备注占位符 2"/>
+          <p:cNvSpPr>
+            <a:spLocks noGrp="1"/>
+          </p:cNvSpPr>
+          <p:nvPr>
+            <p:ph type="body" idx="1"/>
+          </p:nvPr>
+        </p:nvSpPr>
+        <p:spPr/>
+        <p:txBody>
+          <a:bodyPr/>
+          <a:lstStyle/>
+          <a:p>
+            <a:endParaRPr lang="zh-CN" altLang="en-US" dirty="0"/>
+          </a:p>
+        </p:txBody>
+      </p:sp>
+      <p:sp>
+        <p:nvSpPr>
+          <p:cNvPr id="4" name="灯片编号占位符 3"/>
+          <p:cNvSpPr>
+            <a:spLocks noGrp="1"/>
+          </p:cNvSpPr>
+          <p:nvPr>
+            <p:ph type="sldNum" sz="quarter" idx="5"/>
+          </p:nvPr>
+        </p:nvSpPr>
+        <p:spPr/>
+        <p:txBody>
+          <a:bodyPr/>
+          <a:lstStyle/>
+          <a:p>
+            <a:fld id="{7027C812-51A0-4146-959B-26F7A04B258F}" type="slidenum">
+              <a:rPr lang="zh-CN" altLang="en-US" smtClean="0"/>
+              <a:t>8</a:t>
             </a:fld>
             <a:endParaRPr lang="zh-CN" altLang="en-US"/>
           </a:p>
@@ -1417,7 +1503,7 @@
           <a:p>
             <a:fld id="{525738E0-514B-4B27-865A-11992516E93C}" type="datetime4">
               <a:rPr lang="en-US" altLang="zh-CN" smtClean="0"/>
-              <a:t>October 11, 2024</a:t>
+              <a:t>November 13, 2025</a:t>
             </a:fld>
             <a:endParaRPr lang="zh-CN" altLang="en-US"/>
           </a:p>
@@ -3293,7 +3379,7 @@
           <a:p>
             <a:fld id="{FB5C3CA1-B04C-4C04-8D1E-77CF30B3E24E}" type="datetime1">
               <a:rPr lang="en-US" altLang="zh-CN" smtClean="0"/>
-              <a:t>10/11/2024</a:t>
+              <a:t>11/13/2025</a:t>
             </a:fld>
             <a:endParaRPr lang="en-US"/>
           </a:p>
@@ -4578,7 +4664,7 @@
             </a:pPr>
             <a:fld id="{0E0D492D-E599-4F0D-BA78-6EEA0311D34C}" type="datetime4">
               <a:rPr lang="en-US" altLang="zh-CN" smtClean="0"/>
-              <a:t>October 11, 2024</a:t>
+              <a:t>November 13, 2025</a:t>
             </a:fld>
             <a:endParaRPr lang="en-US" altLang="zh-CN">
               <a:cs typeface="Arial" charset="0"/>
@@ -4887,7 +4973,7 @@
             </a:pPr>
             <a:fld id="{D67BBE8C-0A4B-43CE-9430-1242DFAA7339}" type="datetime4">
               <a:rPr lang="en-US" altLang="zh-CN" smtClean="0"/>
-              <a:t>October 11, 2024</a:t>
+              <a:t>November 13, 2025</a:t>
             </a:fld>
             <a:endParaRPr lang="en-US" altLang="zh-CN">
               <a:cs typeface="Arial" charset="0"/>
@@ -5028,7 +5114,7 @@
             </a:pPr>
             <a:fld id="{4E341A39-4A90-477E-8107-2FD1A1C95399}" type="datetime4">
               <a:rPr lang="en-US" altLang="zh-CN" smtClean="0"/>
-              <a:t>October 11, 2024</a:t>
+              <a:t>November 13, 2025</a:t>
             </a:fld>
             <a:endParaRPr lang="en-US" altLang="zh-CN">
               <a:cs typeface="Arial" charset="0"/>
@@ -5333,7 +5419,7 @@
             </a:pPr>
             <a:fld id="{0629EA72-D578-4F57-BEAD-86CF28FC678C}" type="datetime4">
               <a:rPr lang="en-US" altLang="zh-CN" smtClean="0"/>
-              <a:t>October 11, 2024</a:t>
+              <a:t>November 13, 2025</a:t>
             </a:fld>
             <a:endParaRPr lang="en-US" altLang="zh-CN">
               <a:cs typeface="Arial" charset="0"/>
@@ -6125,7 +6211,6 @@
             <a:noFill/>
           </a:ln>
           <a:effectLst/>
-          <a:extLst/>
         </p:spPr>
         <p:txBody>
           <a:bodyPr vert="horz" wrap="square" lIns="91440" tIns="45720" rIns="91440" bIns="45720" numCol="1" anchor="b" anchorCtr="0" compatLnSpc="1">
@@ -6172,7 +6257,6 @@
             <a:noFill/>
           </a:ln>
           <a:effectLst/>
-          <a:extLst/>
         </p:spPr>
         <p:txBody>
           <a:bodyPr vert="horz" wrap="square" lIns="91440" tIns="45720" rIns="91440" bIns="45720" numCol="1" anchor="b" anchorCtr="0" compatLnSpc="1">
@@ -6769,7 +6853,6 @@
             <a:noFill/>
           </a:ln>
           <a:effectLst/>
-          <a:extLst/>
         </p:spPr>
         <p:txBody>
           <a:bodyPr vert="horz" wrap="square" lIns="91440" tIns="45720" rIns="91440" bIns="45720" numCol="1" anchor="b" anchorCtr="0" compatLnSpc="1">
@@ -6791,7 +6874,7 @@
             </a:pPr>
             <a:fld id="{D6C2F118-23C6-4D76-A422-251B03B97126}" type="datetime4">
               <a:rPr lang="en-US" altLang="zh-CN" smtClean="0"/>
-              <a:t>October 11, 2024</a:t>
+              <a:t>November 13, 2025</a:t>
             </a:fld>
             <a:endParaRPr lang="en-US" altLang="zh-CN">
               <a:cs typeface="Arial" charset="0"/>
@@ -7391,6 +7474,229 @@
           <p:cNvPr id="2" name="标题 1">
             <a:extLst>
               <a:ext uri="{FF2B5EF4-FFF2-40B4-BE49-F238E27FC236}">
+                <a16:creationId xmlns:a16="http://schemas.microsoft.com/office/drawing/2014/main" id="{F9020CF6-75DF-4D87-BF84-3CD447376FAF}"/>
+              </a:ext>
+            </a:extLst>
+          </p:cNvPr>
+          <p:cNvSpPr>
+            <a:spLocks noGrp="1"/>
+          </p:cNvSpPr>
+          <p:nvPr>
+            <p:ph type="title"/>
+          </p:nvPr>
+        </p:nvSpPr>
+        <p:spPr/>
+        <p:txBody>
+          <a:bodyPr/>
+          <a:lstStyle/>
+          <a:p>
+            <a:r>
+              <a:rPr lang="zh-CN" altLang="en-US" dirty="0"/>
+              <a:t>安装</a:t>
+            </a:r>
+            <a:r>
+              <a:rPr lang="en-US" altLang="zh-CN" dirty="0"/>
+              <a:t>VIVADO</a:t>
+            </a:r>
+            <a:endParaRPr lang="zh-CN" altLang="en-US" dirty="0"/>
+          </a:p>
+        </p:txBody>
+      </p:sp>
+      <p:sp>
+        <p:nvSpPr>
+          <p:cNvPr id="3" name="内容占位符 2">
+            <a:extLst>
+              <a:ext uri="{FF2B5EF4-FFF2-40B4-BE49-F238E27FC236}">
+                <a16:creationId xmlns:a16="http://schemas.microsoft.com/office/drawing/2014/main" id="{4E4A8C7F-BCA3-46E4-A4C6-F2BC80AC055C}"/>
+              </a:ext>
+            </a:extLst>
+          </p:cNvPr>
+          <p:cNvSpPr>
+            <a:spLocks noGrp="1"/>
+          </p:cNvSpPr>
+          <p:nvPr>
+            <p:ph idx="1"/>
+          </p:nvPr>
+        </p:nvSpPr>
+        <p:spPr/>
+        <p:txBody>
+          <a:bodyPr/>
+          <a:lstStyle/>
+          <a:p>
+            <a:r>
+              <a:rPr lang="zh-CN" altLang="en-US" dirty="0"/>
+              <a:t>登录</a:t>
+            </a:r>
+            <a:r>
+              <a:rPr lang="en-US" altLang="zh-CN" dirty="0" err="1"/>
+              <a:t>ehall</a:t>
+            </a:r>
+            <a:r>
+              <a:rPr lang="zh-CN" altLang="en-US" dirty="0"/>
+              <a:t>，下载</a:t>
+            </a:r>
+            <a:r>
+              <a:rPr lang="en-US" altLang="zh-CN" dirty="0" err="1"/>
+              <a:t>MotionPro</a:t>
+            </a:r>
+            <a:r>
+              <a:rPr lang="zh-CN" altLang="en-US" dirty="0"/>
+              <a:t>并用</a:t>
+            </a:r>
+            <a:r>
+              <a:rPr lang="en-US" altLang="zh-CN" dirty="0"/>
+              <a:t>VPN</a:t>
+            </a:r>
+            <a:r>
+              <a:rPr lang="zh-CN" altLang="en-US" dirty="0"/>
+              <a:t>连接到校园网</a:t>
+            </a:r>
+            <a:endParaRPr lang="en-US" altLang="zh-CN" dirty="0"/>
+          </a:p>
+          <a:p>
+            <a:pPr lvl="1"/>
+            <a:r>
+              <a:rPr lang="en-US" altLang="zh-CN" dirty="0">
+                <a:hlinkClick r:id="rId3"/>
+              </a:rPr>
+              <a:t>https://icampus.fudan.edu.cn/wwwfw/list.htm</a:t>
+            </a:r>
+            <a:r>
+              <a:rPr lang="en-US" altLang="zh-CN" dirty="0"/>
+              <a:t>   </a:t>
+            </a:r>
+          </a:p>
+          <a:p>
+            <a:r>
+              <a:rPr lang="zh-CN" altLang="en-US" dirty="0"/>
+              <a:t>下载并安装复旦云盘</a:t>
+            </a:r>
+            <a:r>
+              <a:rPr lang="en-US" altLang="zh-CN" dirty="0"/>
+              <a:t>FudanCloud-setup-4.0.2.exe</a:t>
+            </a:r>
+          </a:p>
+          <a:p>
+            <a:pPr lvl="1"/>
+            <a:r>
+              <a:rPr lang="zh-CN" altLang="zh-CN" dirty="0">
+                <a:hlinkClick r:id="rId4"/>
+              </a:rPr>
+              <a:t>https://cloud.fudan.edu.cn/#routeview/appdownload</a:t>
+            </a:r>
+            <a:endParaRPr lang="en-US" altLang="zh-CN" dirty="0"/>
+          </a:p>
+          <a:p>
+            <a:r>
+              <a:rPr lang="zh-CN" altLang="en-US" dirty="0"/>
+              <a:t>安装</a:t>
+            </a:r>
+            <a:r>
+              <a:rPr lang="en-US" altLang="zh-CN" dirty="0"/>
+              <a:t>VIVADO-202402</a:t>
+            </a:r>
+          </a:p>
+          <a:p>
+            <a:pPr lvl="1"/>
+            <a:r>
+              <a:rPr lang="en-US" altLang="zh-CN" dirty="0" err="1"/>
+              <a:t>vivado</a:t>
+            </a:r>
+            <a:r>
+              <a:rPr lang="zh-CN" altLang="en-US" dirty="0"/>
+              <a:t>目录：</a:t>
+            </a:r>
+            <a:r>
+              <a:rPr lang="en-US" altLang="zh-CN" dirty="0">
+                <a:hlinkClick r:id="rId5"/>
+              </a:rPr>
+              <a:t>https://cloud.fudan.edu.cn/#routeview/s/3eNDe72W</a:t>
+            </a:r>
+            <a:endParaRPr lang="en-US" altLang="zh-CN" dirty="0"/>
+          </a:p>
+          <a:p>
+            <a:pPr lvl="1"/>
+            <a:r>
+              <a:rPr lang="zh-CN" altLang="en-US" dirty="0"/>
+              <a:t>其中有一个和谐压缩包</a:t>
+            </a:r>
+            <a:r>
+              <a:rPr lang="en-US" altLang="zh-CN" dirty="0" err="1"/>
+              <a:t>eetop.cn_xxxx</a:t>
+            </a:r>
+            <a:endParaRPr lang="en-US" altLang="zh-CN" dirty="0"/>
+          </a:p>
+          <a:p>
+            <a:pPr lvl="1"/>
+            <a:endParaRPr lang="zh-CN" altLang="en-US" sz="1100" dirty="0"/>
+          </a:p>
+        </p:txBody>
+      </p:sp>
+      <p:sp>
+        <p:nvSpPr>
+          <p:cNvPr id="5" name="灯片编号占位符 4">
+            <a:extLst>
+              <a:ext uri="{FF2B5EF4-FFF2-40B4-BE49-F238E27FC236}">
+                <a16:creationId xmlns:a16="http://schemas.microsoft.com/office/drawing/2014/main" id="{CAD48293-A742-4F1C-A238-FD71E6BAE67C}"/>
+              </a:ext>
+            </a:extLst>
+          </p:cNvPr>
+          <p:cNvSpPr>
+            <a:spLocks noGrp="1"/>
+          </p:cNvSpPr>
+          <p:nvPr>
+            <p:ph type="sldNum" sz="quarter" idx="11"/>
+          </p:nvPr>
+        </p:nvSpPr>
+        <p:spPr/>
+        <p:txBody>
+          <a:bodyPr/>
+          <a:lstStyle/>
+          <a:p>
+            <a:fld id="{0C913308-F349-4B6D-A68A-DD1791B4A57B}" type="slidenum">
+              <a:rPr lang="zh-CN" altLang="en-US" smtClean="0"/>
+              <a:t>2</a:t>
+            </a:fld>
+            <a:endParaRPr lang="zh-CN" altLang="en-US"/>
+          </a:p>
+        </p:txBody>
+      </p:sp>
+    </p:spTree>
+    <p:extLst>
+      <p:ext uri="{BB962C8B-B14F-4D97-AF65-F5344CB8AC3E}">
+        <p14:creationId xmlns:p14="http://schemas.microsoft.com/office/powerpoint/2010/main" val="1102399163"/>
+      </p:ext>
+    </p:extLst>
+  </p:cSld>
+  <p:clrMapOvr>
+    <a:masterClrMapping/>
+  </p:clrMapOvr>
+  <p:transition/>
+</p:sld>
+</file>
+
+<file path=ppt/slides/slide3.xml><?xml version="1.0" encoding="utf-8"?>
+<p:sld xmlns:a="http://schemas.openxmlformats.org/drawingml/2006/main" xmlns:r="http://schemas.openxmlformats.org/officeDocument/2006/relationships" xmlns:p="http://schemas.openxmlformats.org/presentationml/2006/main">
+  <p:cSld>
+    <p:spTree>
+      <p:nvGrpSpPr>
+        <p:cNvPr id="1" name=""/>
+        <p:cNvGrpSpPr/>
+        <p:nvPr/>
+      </p:nvGrpSpPr>
+      <p:grpSpPr>
+        <a:xfrm>
+          <a:off x="0" y="0"/>
+          <a:ext cx="0" cy="0"/>
+          <a:chOff x="0" y="0"/>
+          <a:chExt cx="0" cy="0"/>
+        </a:xfrm>
+      </p:grpSpPr>
+      <p:sp>
+        <p:nvSpPr>
+          <p:cNvPr id="2" name="标题 1">
+            <a:extLst>
+              <a:ext uri="{FF2B5EF4-FFF2-40B4-BE49-F238E27FC236}">
                 <a16:creationId xmlns:a16="http://schemas.microsoft.com/office/drawing/2014/main" id="{4427D5D8-9DD3-489F-AAD2-0B3EE849F606}"/>
               </a:ext>
             </a:extLst>
@@ -7930,7 +8236,7 @@
           <a:p>
             <a:fld id="{0C913308-F349-4B6D-A68A-DD1791B4A57B}" type="slidenum">
               <a:rPr lang="zh-CN" altLang="en-US" smtClean="0"/>
-              <a:t>2</a:t>
+              <a:t>3</a:t>
             </a:fld>
             <a:endParaRPr lang="zh-CN" altLang="en-US"/>
           </a:p>
@@ -7950,7 +8256,7 @@
 </p:sld>
 </file>
 
-<file path=ppt/slides/slide3.xml><?xml version="1.0" encoding="utf-8"?>
+<file path=ppt/slides/slide4.xml><?xml version="1.0" encoding="utf-8"?>
 <p:sld xmlns:a="http://schemas.openxmlformats.org/drawingml/2006/main" xmlns:r="http://schemas.openxmlformats.org/officeDocument/2006/relationships" xmlns:p="http://schemas.openxmlformats.org/presentationml/2006/main">
   <p:cSld>
     <p:spTree>
@@ -8389,7 +8695,7 @@
           <a:p>
             <a:fld id="{0C913308-F349-4B6D-A68A-DD1791B4A57B}" type="slidenum">
               <a:rPr lang="zh-CN" altLang="en-US" smtClean="0"/>
-              <a:t>3</a:t>
+              <a:t>4</a:t>
             </a:fld>
             <a:endParaRPr lang="zh-CN" altLang="en-US" dirty="0"/>
           </a:p>
@@ -8515,7 +8821,7 @@
 </p:sld>
 </file>
 
-<file path=ppt/slides/slide4.xml><?xml version="1.0" encoding="utf-8"?>
+<file path=ppt/slides/slide5.xml><?xml version="1.0" encoding="utf-8"?>
 <p:sld xmlns:a="http://schemas.openxmlformats.org/drawingml/2006/main" xmlns:r="http://schemas.openxmlformats.org/officeDocument/2006/relationships" xmlns:p="http://schemas.openxmlformats.org/presentationml/2006/main">
   <p:cSld>
     <p:spTree>
@@ -8646,7 +8952,7 @@
           <a:p>
             <a:fld id="{0C913308-F349-4B6D-A68A-DD1791B4A57B}" type="slidenum">
               <a:rPr lang="zh-CN" altLang="en-US" smtClean="0"/>
-              <a:t>4</a:t>
+              <a:t>5</a:t>
             </a:fld>
             <a:endParaRPr lang="zh-CN" altLang="en-US"/>
           </a:p>
@@ -8726,7 +9032,7 @@
 </p:sld>
 </file>
 
-<file path=ppt/slides/slide5.xml><?xml version="1.0" encoding="utf-8"?>
+<file path=ppt/slides/slide6.xml><?xml version="1.0" encoding="utf-8"?>
 <p:sld xmlns:a="http://schemas.openxmlformats.org/drawingml/2006/main" xmlns:r="http://schemas.openxmlformats.org/officeDocument/2006/relationships" xmlns:p="http://schemas.openxmlformats.org/presentationml/2006/main">
   <p:cSld>
     <p:spTree>
@@ -8852,7 +9158,7 @@
           <a:p>
             <a:fld id="{0C913308-F349-4B6D-A68A-DD1791B4A57B}" type="slidenum">
               <a:rPr lang="zh-CN" altLang="en-US" smtClean="0"/>
-              <a:t>5</a:t>
+              <a:t>6</a:t>
             </a:fld>
             <a:endParaRPr lang="zh-CN" altLang="en-US"/>
           </a:p>
@@ -8962,7 +9268,7 @@
 </p:sld>
 </file>
 
-<file path=ppt/slides/slide6.xml><?xml version="1.0" encoding="utf-8"?>
+<file path=ppt/slides/slide7.xml><?xml version="1.0" encoding="utf-8"?>
 <p:sld xmlns:a="http://schemas.openxmlformats.org/drawingml/2006/main" xmlns:r="http://schemas.openxmlformats.org/officeDocument/2006/relationships" xmlns:p="http://schemas.openxmlformats.org/presentationml/2006/main">
   <p:cSld>
     <p:spTree>
@@ -9029,7 +9335,7 @@
           <a:p>
             <a:fld id="{0C913308-F349-4B6D-A68A-DD1791B4A57B}" type="slidenum">
               <a:rPr lang="zh-CN" altLang="en-US" smtClean="0"/>
-              <a:t>6</a:t>
+              <a:t>7</a:t>
             </a:fld>
             <a:endParaRPr lang="zh-CN" altLang="en-US" dirty="0"/>
           </a:p>
@@ -9217,7 +9523,7 @@
 </p:sld>
 </file>
 
-<file path=ppt/slides/slide7.xml><?xml version="1.0" encoding="utf-8"?>
+<file path=ppt/slides/slide8.xml><?xml version="1.0" encoding="utf-8"?>
 <p:sld xmlns:a="http://schemas.openxmlformats.org/drawingml/2006/main" xmlns:r="http://schemas.openxmlformats.org/officeDocument/2006/relationships" xmlns:p="http://schemas.openxmlformats.org/presentationml/2006/main">
   <p:cSld>
     <p:spTree>
@@ -9285,7 +9591,7 @@
           <a:p>
             <a:fld id="{0C913308-F349-4B6D-A68A-DD1791B4A57B}" type="slidenum">
               <a:rPr lang="zh-CN" altLang="en-US" smtClean="0"/>
-              <a:t>7</a:t>
+              <a:t>8</a:t>
             </a:fld>
             <a:endParaRPr lang="zh-CN" altLang="en-US" dirty="0"/>
           </a:p>
@@ -10208,7 +10514,7 @@
         <a:sysClr val="windowText" lastClr="000000"/>
       </a:dk1>
       <a:lt1>
-        <a:sysClr val="window" lastClr="CEEACA"/>
+        <a:sysClr val="window" lastClr="CCEDC7"/>
       </a:lt1>
       <a:dk2>
         <a:srgbClr val="1F497D"/>
